--- a/第四次作业.pptx
+++ b/第四次作业.pptx
@@ -3945,6 +3945,42 @@
               <a:rPr lang="zh-CN" altLang="en-US" dirty="0"/>
               <a:t>实现均可</a:t>
             </a:r>
+          </a:p>
+        </p:txBody>
+      </p:sp>
+      <p:sp>
+        <p:nvSpPr>
+          <p:cNvPr id="13" name="文本框 12">
+            <a:extLst>
+              <a:ext uri="{FF2B5EF4-FFF2-40B4-BE49-F238E27FC236}">
+                <a16:creationId xmlns:a16="http://schemas.microsoft.com/office/drawing/2014/main" id="{4838BC5B-86CF-CFD7-5E4E-5409AA03D11D}"/>
+              </a:ext>
+            </a:extLst>
+          </p:cNvPr>
+          <p:cNvSpPr txBox="1"/>
+          <p:nvPr/>
+        </p:nvSpPr>
+        <p:spPr>
+          <a:xfrm>
+            <a:off x="2072218" y="5826967"/>
+            <a:ext cx="4608944" cy="369332"/>
+          </a:xfrm>
+          <a:prstGeom prst="rect">
+            <a:avLst/>
+          </a:prstGeom>
+          <a:noFill/>
+        </p:spPr>
+        <p:txBody>
+          <a:bodyPr wrap="square">
+            <a:spAutoFit/>
+          </a:bodyPr>
+          <a:lstStyle/>
+          <a:p>
+            <a:r>
+              <a:rPr lang="en-US" altLang="zh-CN" dirty="0"/>
+              <a:t>https://github.com/Crunch-UQ4MI/neuraluq</a:t>
+            </a:r>
+            <a:endParaRPr lang="zh-CN" altLang="en-US" dirty="0"/>
           </a:p>
         </p:txBody>
       </p:sp>
